--- a/analise/entregaveis/Tempos e Movimentos - Apresentacao.pptx
+++ b/analise/entregaveis/Tempos e Movimentos - Apresentacao.pptx
@@ -18,7 +18,6 @@
     <p:sldId id="266" r:id="rId17"/>
     <p:sldId id="267" r:id="rId18"/>
     <p:sldId id="268" r:id="rId19"/>
-    <p:sldId id="269" r:id="rId20"/>
   </p:sldIdLst>
   <p:sldSz cx="12191695" cy="6858000" type="screen4x3"/>
   <p:notesSz cx="6858000" cy="9144000"/>
@@ -5223,7 +5222,7 @@
                 </a:solidFill>
                 <a:latin typeface="Calibri"/>
               </a:rPr>
-              <a:t>84 visitas medidas  ·  47 promotores  ·  48 setores  ·  coleta de 11/08/2026 a 18/08/2026</a:t>
+              <a:t>Coleta em campo  ·  11/08/2026 a 18/08/2026</a:t>
             </a:r>
           </a:p>
         </p:txBody>
@@ -5376,7 +5375,7 @@
                 </a:solidFill>
                 <a:latin typeface="Calibri"/>
               </a:rPr>
-              <a:t>As duas leituras convergem sem que o cálculo force isso — indício de que a cronometragem foi honesta.</a:t>
+              <a:t>As duas leituras chegam ao mesmo lugar por caminhos independentes: o tempo medido dentro da loja</a:t>
             </a:r>
           </a:p>
           <a:p>
@@ -5392,7 +5391,7 @@
                 </a:solidFill>
                 <a:latin typeface="Calibri"/>
               </a:rPr>
-              <a:t>Mas as duas ignoram o deslocamento: a rota real é mais curta do que a projeção sugere.</a:t>
+              <a:t>prevê o tamanho da rota que o campo declara. Mas nenhuma das duas inclui o trajeto entre lojas.</a:t>
             </a:r>
           </a:p>
         </p:txBody>
@@ -5527,7 +5526,7 @@
                 </a:solidFill>
                 <a:latin typeface="Calibri"/>
               </a:rPr>
-              <a:t>Bloco incluído no formulário em 15/08, depois do início da coleta. Amostra ainda reduzida.</a:t>
+              <a:t>Quanto custa o caminho até a loja, e quanto custa alongar uma rota.</a:t>
             </a:r>
           </a:p>
         </p:txBody>
@@ -5963,7 +5962,7 @@
                 </a:solidFill>
                 <a:latin typeface="Calibri"/>
               </a:rPr>
-              <a:t>O estudo mede o tempo dentro da loja.</a:t>
+              <a:t>Cada loja a mais numa rota cobra</a:t>
             </a:r>
           </a:p>
           <a:p>
@@ -5979,7 +5978,7 @@
                 </a:solidFill>
                 <a:latin typeface="Calibri"/>
               </a:rPr>
-              <a:t>O trajeto fica de fora das projeções.</a:t>
+              <a:t>dois tempos: o da visita e o do</a:t>
             </a:r>
           </a:p>
           <a:p>
@@ -5995,6 +5994,22 @@
                 </a:solidFill>
                 <a:latin typeface="Calibri"/>
               </a:rPr>
+              <a:t>trajeto até ela.</a:t>
+            </a:r>
+          </a:p>
+          <a:p>
+            <a:pPr algn="l">
+              <a:lnSpc>
+                <a:spcPct val="135000"/>
+              </a:lnSpc>
+            </a:pPr>
+            <a:r>
+              <a:rPr sz="1300" b="0">
+                <a:solidFill>
+                  <a:srgbClr val="14181D"/>
+                </a:solidFill>
+                <a:latin typeface="Calibri"/>
+              </a:rPr>
               <a:t/>
             </a:r>
           </a:p>
@@ -6011,7 +6026,7 @@
                 </a:solidFill>
                 <a:latin typeface="Calibri"/>
               </a:rPr>
-              <a:t>Com 14 medições, ainda é indício — mas</a:t>
+              <a:t>O trajeto de casa é pago uma vez</a:t>
             </a:r>
           </a:p>
           <a:p>
@@ -6027,7 +6042,7 @@
                 </a:solidFill>
                 <a:latin typeface="Calibri"/>
               </a:rPr>
-              <a:t>já mostra que o trajeto não é resíduo:</a:t>
+              <a:t>por dia; o trajeto entre lojas se</a:t>
             </a:r>
           </a:p>
           <a:p>
@@ -6043,7 +6058,7 @@
                 </a:solidFill>
                 <a:latin typeface="Calibri"/>
               </a:rPr>
-              <a:t>pesa numa rota de várias lojas.</a:t>
+              <a:t>multiplica.</a:t>
             </a:r>
           </a:p>
         </p:txBody>
@@ -6137,7 +6152,7 @@
                 </a:solidFill>
                 <a:latin typeface="Calibri"/>
               </a:rPr>
-              <a:t>Medições feitas por 5 promotores. Recomenda-se manter a coleta até estabilizar.</a:t>
+              <a:t>O trajeto entre lojas é o que se multiplica a cada loja a mais na rota.</a:t>
             </a:r>
           </a:p>
         </p:txBody>
@@ -6194,7 +6209,7 @@
                 </a:solidFill>
                 <a:latin typeface="Cambria"/>
               </a:rPr>
-              <a:t>O que este estudo ainda não responde</a:t>
+              <a:t>Para onde olhar primeiro</a:t>
             </a:r>
           </a:p>
         </p:txBody>
@@ -6233,29 +6248,27 @@
                 </a:solidFill>
                 <a:latin typeface="Calibri"/>
               </a:rPr>
-              <a:t>Os limites são parte da entrega: sem eles, o número vira decisão errada.</a:t>
-            </a:r>
-          </a:p>
-        </p:txBody>
-      </p:sp>
-      <p:sp>
-        <p:nvSpPr>
-          <p:cNvPr id="4" name="Rounded Rectangle 3"/>
+              <a:t>Ordenado por tamanho da oportunidade e por facilidade de execução.</a:t>
+            </a:r>
+          </a:p>
+        </p:txBody>
+      </p:sp>
+      <p:sp>
+        <p:nvSpPr>
+          <p:cNvPr id="4" name="Oval 3"/>
           <p:cNvSpPr/>
           <p:nvPr/>
         </p:nvSpPr>
         <p:spPr>
           <a:xfrm>
-            <a:off x="822960" y="2148840"/>
-            <a:ext cx="10561320" cy="932688"/>
-          </a:xfrm>
-          <a:prstGeom prst="roundRect">
-            <a:avLst>
-              <a:gd name="adj" fmla="val 5000"/>
-            </a:avLst>
+            <a:off x="822960" y="2103120"/>
+            <a:ext cx="502920" cy="502920"/>
+          </a:xfrm>
+          <a:prstGeom prst="ellipse">
+            <a:avLst/>
           </a:prstGeom>
           <a:solidFill>
-            <a:srgbClr val="E3EEF1"/>
+            <a:srgbClr val="B85042"/>
           </a:solidFill>
           <a:ln>
             <a:noFill/>
@@ -6281,6 +6294,15 @@
           <a:lstStyle/>
           <a:p>
             <a:pPr algn="ctr"/>
+            <a:r>
+              <a:rPr sz="1600" b="1">
+                <a:solidFill>
+                  <a:srgbClr val="FFFFFF"/>
+                </a:solidFill>
+                <a:latin typeface="Cambria"/>
+              </a:rPr>
+              <a:t>1</a:t>
+            </a:r>
           </a:p>
         </p:txBody>
       </p:sp>
@@ -6292,8 +6314,8 @@
         </p:nvSpPr>
         <p:spPr>
           <a:xfrm>
-            <a:off x="1143000" y="2304288"/>
-            <a:ext cx="3017520" cy="365760"/>
+            <a:off x="1600200" y="2121408"/>
+            <a:ext cx="9784080" cy="365760"/>
           </a:xfrm>
           <a:prstGeom prst="rect">
             <a:avLst/>
@@ -6312,13 +6334,13 @@
               </a:lnSpc>
             </a:pPr>
             <a:r>
-              <a:rPr sz="1400" b="1">
+              <a:rPr sz="1600" b="1">
                 <a:solidFill>
                   <a:srgbClr val="123A4D"/>
                 </a:solidFill>
-                <a:latin typeface="Calibri"/>
-              </a:rPr>
-              <a:t>O trajeto entre lojas</a:t>
+                <a:latin typeface="Cambria"/>
+              </a:rPr>
+              <a:t>Atacar o tempo de busca no estoque</a:t>
             </a:r>
           </a:p>
         </p:txBody>
@@ -6331,8 +6353,8 @@
         </p:nvSpPr>
         <p:spPr>
           <a:xfrm>
-            <a:off x="4297680" y="2276856"/>
-            <a:ext cx="6858000" cy="685800"/>
+            <a:off x="1600200" y="2560320"/>
+            <a:ext cx="9784080" cy="548640"/>
           </a:xfrm>
           <a:prstGeom prst="rect">
             <a:avLst/>
@@ -6357,29 +6379,27 @@
                 </a:solidFill>
                 <a:latin typeface="Calibri"/>
               </a:rPr>
-              <a:t>Apenas 14 medições. Nenhuma projeção de jornada aqui inclui deslocamento — a rota real é mais curta do que a projetada.</a:t>
-            </a:r>
-          </a:p>
-        </p:txBody>
-      </p:sp>
-      <p:sp>
-        <p:nvSpPr>
-          <p:cNvPr id="7" name="Rounded Rectangle 6"/>
+              <a:t>Buscar item faltante é o 2º maior movimento da jornada. Endereçamento e separação prévia atacam direto.</a:t>
+            </a:r>
+          </a:p>
+        </p:txBody>
+      </p:sp>
+      <p:sp>
+        <p:nvSpPr>
+          <p:cNvPr id="7" name="Oval 6"/>
           <p:cNvSpPr/>
           <p:nvPr/>
         </p:nvSpPr>
         <p:spPr>
           <a:xfrm>
-            <a:off x="822960" y="3200400"/>
-            <a:ext cx="10561320" cy="932688"/>
-          </a:xfrm>
-          <a:prstGeom prst="roundRect">
-            <a:avLst>
-              <a:gd name="adj" fmla="val 5000"/>
-            </a:avLst>
+            <a:off x="822960" y="3163824"/>
+            <a:ext cx="502920" cy="502920"/>
+          </a:xfrm>
+          <a:prstGeom prst="ellipse">
+            <a:avLst/>
           </a:prstGeom>
           <a:solidFill>
-            <a:srgbClr val="F6F8FA"/>
+            <a:srgbClr val="2C7391"/>
           </a:solidFill>
           <a:ln>
             <a:noFill/>
@@ -6405,6 +6425,15 @@
           <a:lstStyle/>
           <a:p>
             <a:pPr algn="ctr"/>
+            <a:r>
+              <a:rPr sz="1600" b="1">
+                <a:solidFill>
+                  <a:srgbClr val="FFFFFF"/>
+                </a:solidFill>
+                <a:latin typeface="Cambria"/>
+              </a:rPr>
+              <a:t>2</a:t>
+            </a:r>
           </a:p>
         </p:txBody>
       </p:sp>
@@ -6416,8 +6445,8 @@
         </p:nvSpPr>
         <p:spPr>
           <a:xfrm>
-            <a:off x="1143000" y="3355848"/>
-            <a:ext cx="3017520" cy="365760"/>
+            <a:off x="1600200" y="3182112"/>
+            <a:ext cx="9784080" cy="365760"/>
           </a:xfrm>
           <a:prstGeom prst="rect">
             <a:avLst/>
@@ -6436,13 +6465,13 @@
               </a:lnSpc>
             </a:pPr>
             <a:r>
-              <a:rPr sz="1400" b="1">
+              <a:rPr sz="1600" b="1">
                 <a:solidFill>
                   <a:srgbClr val="123A4D"/>
                 </a:solidFill>
-                <a:latin typeface="Calibri"/>
-              </a:rPr>
-              <a:t>Canais de amostra reduzida</a:t>
+                <a:latin typeface="Cambria"/>
+              </a:rPr>
+              <a:t>Padronizar onde a variação é maior</a:t>
             </a:r>
           </a:p>
         </p:txBody>
@@ -6455,8 +6484,8 @@
         </p:nvSpPr>
         <p:spPr>
           <a:xfrm>
-            <a:off x="4297680" y="3328416"/>
-            <a:ext cx="6858000" cy="685800"/>
+            <a:off x="1600200" y="3621024"/>
+            <a:ext cx="9784080" cy="548640"/>
           </a:xfrm>
           <a:prstGeom prst="rect">
             <a:avLst/>
@@ -6481,29 +6510,27 @@
                 </a:solidFill>
                 <a:latin typeface="Calibri"/>
               </a:rPr>
-              <a:t>CLUB, LASA, PERFUMARIA têm menos de 8 visitas. São indício, não média: uma visita atípica move o número inteiro.</a:t>
-            </a:r>
-          </a:p>
-        </p:txBody>
-      </p:sp>
-      <p:sp>
-        <p:nvSpPr>
-          <p:cNvPr id="10" name="Rounded Rectangle 9"/>
+              <a:t>A faixa entre a visita mais rápida e a mais lenta é ampla demais para ser só porte de loja. Um padrão por canal reduz a cauda.</a:t>
+            </a:r>
+          </a:p>
+        </p:txBody>
+      </p:sp>
+      <p:sp>
+        <p:nvSpPr>
+          <p:cNvPr id="10" name="Oval 9"/>
           <p:cNvSpPr/>
           <p:nvPr/>
         </p:nvSpPr>
         <p:spPr>
           <a:xfrm>
-            <a:off x="822960" y="4251960"/>
-            <a:ext cx="10561320" cy="932688"/>
-          </a:xfrm>
-          <a:prstGeom prst="roundRect">
-            <a:avLst>
-              <a:gd name="adj" fmla="val 5000"/>
-            </a:avLst>
+            <a:off x="822960" y="4224528"/>
+            <a:ext cx="502920" cy="502920"/>
+          </a:xfrm>
+          <a:prstGeom prst="ellipse">
+            <a:avLst/>
           </a:prstGeom>
           <a:solidFill>
-            <a:srgbClr val="E3EEF1"/>
+            <a:srgbClr val="123A4D"/>
           </a:solidFill>
           <a:ln>
             <a:noFill/>
@@ -6529,6 +6556,15 @@
           <a:lstStyle/>
           <a:p>
             <a:pPr algn="ctr"/>
+            <a:r>
+              <a:rPr sz="1600" b="1">
+                <a:solidFill>
+                  <a:srgbClr val="FFFFFF"/>
+                </a:solidFill>
+                <a:latin typeface="Cambria"/>
+              </a:rPr>
+              <a:t>3</a:t>
+            </a:r>
           </a:p>
         </p:txBody>
       </p:sp>
@@ -6540,8 +6576,8 @@
         </p:nvSpPr>
         <p:spPr>
           <a:xfrm>
-            <a:off x="1143000" y="4407408"/>
-            <a:ext cx="3017520" cy="365760"/>
+            <a:off x="1600200" y="4242816"/>
+            <a:ext cx="9784080" cy="365760"/>
           </a:xfrm>
           <a:prstGeom prst="rect">
             <a:avLst/>
@@ -6560,13 +6596,13 @@
               </a:lnSpc>
             </a:pPr>
             <a:r>
-              <a:rPr sz="1400" b="1">
+              <a:rPr sz="1600" b="1">
                 <a:solidFill>
                   <a:srgbClr val="123A4D"/>
                 </a:solidFill>
-                <a:latin typeface="Calibri"/>
-              </a:rPr>
-              <a:t>Pausas e imprevistos</a:t>
+                <a:latin typeface="Cambria"/>
+              </a:rPr>
+              <a:t>Tratar DPP como operação própria</a:t>
             </a:r>
           </a:p>
         </p:txBody>
@@ -6579,8 +6615,8 @@
         </p:nvSpPr>
         <p:spPr>
           <a:xfrm>
-            <a:off x="4297680" y="4379976"/>
-            <a:ext cx="6858000" cy="685800"/>
+            <a:off x="1600200" y="4681728"/>
+            <a:ext cx="9784080" cy="548640"/>
           </a:xfrm>
           <a:prstGeom prst="rect">
             <a:avLst/>
@@ -6605,29 +6641,27 @@
                 </a:solidFill>
                 <a:latin typeface="Calibri"/>
               </a:rPr>
-              <a:t>Almoço, deslocamento a pé no shopping e espera fora do previsto não foram isolados na medição.</a:t>
-            </a:r>
-          </a:p>
-        </p:txBody>
-      </p:sp>
-      <p:sp>
-        <p:nvSpPr>
-          <p:cNvPr id="13" name="Rounded Rectangle 12"/>
+              <a:t>Com 4 lojas por dia, o custo fixo de entrada pesa 4 vezes. Reduzir fricção de acesso vale mais nele do que em qualquer outro canal.</a:t>
+            </a:r>
+          </a:p>
+        </p:txBody>
+      </p:sp>
+      <p:sp>
+        <p:nvSpPr>
+          <p:cNvPr id="13" name="Oval 12"/>
           <p:cNvSpPr/>
           <p:nvPr/>
         </p:nvSpPr>
         <p:spPr>
           <a:xfrm>
-            <a:off x="822960" y="5303520"/>
-            <a:ext cx="10561320" cy="932688"/>
-          </a:xfrm>
-          <a:prstGeom prst="roundRect">
-            <a:avLst>
-              <a:gd name="adj" fmla="val 5000"/>
-            </a:avLst>
+            <a:off x="822960" y="5285232"/>
+            <a:ext cx="502920" cy="502920"/>
+          </a:xfrm>
+          <a:prstGeom prst="ellipse">
+            <a:avLst/>
           </a:prstGeom>
           <a:solidFill>
-            <a:srgbClr val="F6F8FA"/>
+            <a:srgbClr val="2F6B4F"/>
           </a:solidFill>
           <a:ln>
             <a:noFill/>
@@ -6653,6 +6687,15 @@
           <a:lstStyle/>
           <a:p>
             <a:pPr algn="ctr"/>
+            <a:r>
+              <a:rPr sz="1600" b="1">
+                <a:solidFill>
+                  <a:srgbClr val="FFFFFF"/>
+                </a:solidFill>
+                <a:latin typeface="Cambria"/>
+              </a:rPr>
+              <a:t>4</a:t>
+            </a:r>
           </a:p>
         </p:txBody>
       </p:sp>
@@ -6664,8 +6707,8 @@
         </p:nvSpPr>
         <p:spPr>
           <a:xfrm>
-            <a:off x="1143000" y="5458968"/>
-            <a:ext cx="3017520" cy="365760"/>
+            <a:off x="1600200" y="5303520"/>
+            <a:ext cx="9784080" cy="365760"/>
           </a:xfrm>
           <a:prstGeom prst="rect">
             <a:avLst/>
@@ -6684,13 +6727,13 @@
               </a:lnSpc>
             </a:pPr>
             <a:r>
-              <a:rPr sz="1400" b="1">
+              <a:rPr sz="1600" b="1">
                 <a:solidFill>
                   <a:srgbClr val="123A4D"/>
                 </a:solidFill>
-                <a:latin typeface="Calibri"/>
-              </a:rPr>
-              <a:t>Autodeclaração</a:t>
+                <a:latin typeface="Cambria"/>
+              </a:rPr>
+              <a:t>Dimensionar a rota com o trajeto incluído</a:t>
             </a:r>
           </a:p>
         </p:txBody>
@@ -6703,8 +6746,8 @@
         </p:nvSpPr>
         <p:spPr>
           <a:xfrm>
-            <a:off x="4297680" y="5431536"/>
-            <a:ext cx="6858000" cy="685800"/>
+            <a:off x="1600200" y="5742432"/>
+            <a:ext cx="9784080" cy="548640"/>
           </a:xfrm>
           <a:prstGeom prst="rect">
             <a:avLst/>
@@ -6729,7 +6772,7 @@
                 </a:solidFill>
                 <a:latin typeface="Calibri"/>
               </a:rPr>
-              <a:t>Cada promotor cronometrou a própria jornada. Não houve observador externo — o viés possível é de arredondamento, não de intenção.</a:t>
+              <a:t>Tempo de loja e trajeto já estão medidos. Cruzá-los por setor mostra quais rotas cabem na jornada e quais precisam ser redesenhadas.</a:t>
             </a:r>
           </a:p>
         </p:txBody>
@@ -6768,7 +6811,7 @@
                 </a:solidFill>
                 <a:latin typeface="Calibri"/>
               </a:rPr>
-              <a:t>Nenhum destes invalida os achados — todos limitam o quanto se pode extrapolar deles.</a:t>
+              <a:t>As recomendações saem do que foi medido; o dimensionamento de ganho exige um piloto.</a:t>
             </a:r>
           </a:p>
         </p:txBody>
@@ -6782,665 +6825,6 @@
 </file>
 
 <file path=ppt/slides/slide13.xml><?xml version="1.0" encoding="utf-8"?>
-<p:sld xmlns:a="http://schemas.openxmlformats.org/drawingml/2006/main" xmlns:p="http://schemas.openxmlformats.org/presentationml/2006/main" xmlns:r="http://schemas.openxmlformats.org/officeDocument/2006/relationships">
-  <p:cSld>
-    <p:spTree>
-      <p:nvGrpSpPr>
-        <p:cNvPr id="1" name=""/>
-        <p:cNvGrpSpPr/>
-        <p:nvPr/>
-      </p:nvGrpSpPr>
-      <p:grpSpPr/>
-      <p:sp>
-        <p:nvSpPr>
-          <p:cNvPr id="2" name="TextBox 1"/>
-          <p:cNvSpPr txBox="1"/>
-          <p:nvPr/>
-        </p:nvSpPr>
-        <p:spPr>
-          <a:xfrm>
-            <a:off x="822960" y="502920"/>
-            <a:ext cx="10607040" cy="914400"/>
-          </a:xfrm>
-          <a:prstGeom prst="rect">
-            <a:avLst/>
-          </a:prstGeom>
-          <a:noFill/>
-        </p:spPr>
-        <p:txBody>
-          <a:bodyPr wrap="square" lIns="0" rIns="0" tIns="0" bIns="0" anchor="t">
-            <a:spAutoFit/>
-          </a:bodyPr>
-          <a:lstStyle/>
-          <a:p>
-            <a:pPr algn="l">
-              <a:lnSpc>
-                <a:spcPct val="125000"/>
-              </a:lnSpc>
-            </a:pPr>
-            <a:r>
-              <a:rPr sz="3200" b="1">
-                <a:solidFill>
-                  <a:srgbClr val="123A4D"/>
-                </a:solidFill>
-                <a:latin typeface="Cambria"/>
-              </a:rPr>
-              <a:t>Para onde olhar primeiro</a:t>
-            </a:r>
-          </a:p>
-        </p:txBody>
-      </p:sp>
-      <p:sp>
-        <p:nvSpPr>
-          <p:cNvPr id="3" name="TextBox 2"/>
-          <p:cNvSpPr txBox="1"/>
-          <p:nvPr/>
-        </p:nvSpPr>
-        <p:spPr>
-          <a:xfrm>
-            <a:off x="822960" y="1371600"/>
-            <a:ext cx="10607040" cy="502920"/>
-          </a:xfrm>
-          <a:prstGeom prst="rect">
-            <a:avLst/>
-          </a:prstGeom>
-          <a:noFill/>
-        </p:spPr>
-        <p:txBody>
-          <a:bodyPr wrap="square" lIns="0" rIns="0" tIns="0" bIns="0" anchor="t">
-            <a:spAutoFit/>
-          </a:bodyPr>
-          <a:lstStyle/>
-          <a:p>
-            <a:pPr algn="l">
-              <a:lnSpc>
-                <a:spcPct val="125000"/>
-              </a:lnSpc>
-            </a:pPr>
-            <a:r>
-              <a:rPr sz="1300" b="0">
-                <a:solidFill>
-                  <a:srgbClr val="6D7887"/>
-                </a:solidFill>
-                <a:latin typeface="Calibri"/>
-              </a:rPr>
-              <a:t>Ordenado por tamanho da oportunidade e por facilidade de execução.</a:t>
-            </a:r>
-          </a:p>
-        </p:txBody>
-      </p:sp>
-      <p:sp>
-        <p:nvSpPr>
-          <p:cNvPr id="4" name="Oval 3"/>
-          <p:cNvSpPr/>
-          <p:nvPr/>
-        </p:nvSpPr>
-        <p:spPr>
-          <a:xfrm>
-            <a:off x="822960" y="2103120"/>
-            <a:ext cx="502920" cy="502920"/>
-          </a:xfrm>
-          <a:prstGeom prst="ellipse">
-            <a:avLst/>
-          </a:prstGeom>
-          <a:solidFill>
-            <a:srgbClr val="B85042"/>
-          </a:solidFill>
-          <a:ln>
-            <a:noFill/>
-          </a:ln>
-          <a:effectLst/>
-        </p:spPr>
-        <p:style>
-          <a:lnRef idx="1">
-            <a:schemeClr val="accent1"/>
-          </a:lnRef>
-          <a:fillRef idx="3">
-            <a:schemeClr val="accent1"/>
-          </a:fillRef>
-          <a:effectRef idx="2">
-            <a:schemeClr val="accent1"/>
-          </a:effectRef>
-          <a:fontRef idx="minor">
-            <a:schemeClr val="lt1"/>
-          </a:fontRef>
-        </p:style>
-        <p:txBody>
-          <a:bodyPr rtlCol="0" anchor="ctr"/>
-          <a:lstStyle/>
-          <a:p>
-            <a:pPr algn="ctr"/>
-            <a:r>
-              <a:rPr sz="1600" b="1">
-                <a:solidFill>
-                  <a:srgbClr val="FFFFFF"/>
-                </a:solidFill>
-                <a:latin typeface="Cambria"/>
-              </a:rPr>
-              <a:t>1</a:t>
-            </a:r>
-          </a:p>
-        </p:txBody>
-      </p:sp>
-      <p:sp>
-        <p:nvSpPr>
-          <p:cNvPr id="5" name="TextBox 4"/>
-          <p:cNvSpPr txBox="1"/>
-          <p:nvPr/>
-        </p:nvSpPr>
-        <p:spPr>
-          <a:xfrm>
-            <a:off x="1600200" y="2121408"/>
-            <a:ext cx="9784080" cy="365760"/>
-          </a:xfrm>
-          <a:prstGeom prst="rect">
-            <a:avLst/>
-          </a:prstGeom>
-          <a:noFill/>
-        </p:spPr>
-        <p:txBody>
-          <a:bodyPr wrap="square" lIns="0" rIns="0" tIns="0" bIns="0" anchor="t">
-            <a:spAutoFit/>
-          </a:bodyPr>
-          <a:lstStyle/>
-          <a:p>
-            <a:pPr algn="l">
-              <a:lnSpc>
-                <a:spcPct val="125000"/>
-              </a:lnSpc>
-            </a:pPr>
-            <a:r>
-              <a:rPr sz="1600" b="1">
-                <a:solidFill>
-                  <a:srgbClr val="123A4D"/>
-                </a:solidFill>
-                <a:latin typeface="Cambria"/>
-              </a:rPr>
-              <a:t>Atacar o tempo de busca no estoque</a:t>
-            </a:r>
-          </a:p>
-        </p:txBody>
-      </p:sp>
-      <p:sp>
-        <p:nvSpPr>
-          <p:cNvPr id="6" name="TextBox 5"/>
-          <p:cNvSpPr txBox="1"/>
-          <p:nvPr/>
-        </p:nvSpPr>
-        <p:spPr>
-          <a:xfrm>
-            <a:off x="1600200" y="2560320"/>
-            <a:ext cx="9784080" cy="548640"/>
-          </a:xfrm>
-          <a:prstGeom prst="rect">
-            <a:avLst/>
-          </a:prstGeom>
-          <a:noFill/>
-        </p:spPr>
-        <p:txBody>
-          <a:bodyPr wrap="square" lIns="0" rIns="0" tIns="0" bIns="0" anchor="t">
-            <a:spAutoFit/>
-          </a:bodyPr>
-          <a:lstStyle/>
-          <a:p>
-            <a:pPr algn="l">
-              <a:lnSpc>
-                <a:spcPct val="130000"/>
-              </a:lnSpc>
-            </a:pPr>
-            <a:r>
-              <a:rPr sz="1250" b="0">
-                <a:solidFill>
-                  <a:srgbClr val="14181D"/>
-                </a:solidFill>
-                <a:latin typeface="Calibri"/>
-              </a:rPr>
-              <a:t>Buscar item faltante é o 2º maior movimento da jornada. Endereçamento e separação prévia atacam direto.</a:t>
-            </a:r>
-          </a:p>
-        </p:txBody>
-      </p:sp>
-      <p:sp>
-        <p:nvSpPr>
-          <p:cNvPr id="7" name="Oval 6"/>
-          <p:cNvSpPr/>
-          <p:nvPr/>
-        </p:nvSpPr>
-        <p:spPr>
-          <a:xfrm>
-            <a:off x="822960" y="3163824"/>
-            <a:ext cx="502920" cy="502920"/>
-          </a:xfrm>
-          <a:prstGeom prst="ellipse">
-            <a:avLst/>
-          </a:prstGeom>
-          <a:solidFill>
-            <a:srgbClr val="2C7391"/>
-          </a:solidFill>
-          <a:ln>
-            <a:noFill/>
-          </a:ln>
-          <a:effectLst/>
-        </p:spPr>
-        <p:style>
-          <a:lnRef idx="1">
-            <a:schemeClr val="accent1"/>
-          </a:lnRef>
-          <a:fillRef idx="3">
-            <a:schemeClr val="accent1"/>
-          </a:fillRef>
-          <a:effectRef idx="2">
-            <a:schemeClr val="accent1"/>
-          </a:effectRef>
-          <a:fontRef idx="minor">
-            <a:schemeClr val="lt1"/>
-          </a:fontRef>
-        </p:style>
-        <p:txBody>
-          <a:bodyPr rtlCol="0" anchor="ctr"/>
-          <a:lstStyle/>
-          <a:p>
-            <a:pPr algn="ctr"/>
-            <a:r>
-              <a:rPr sz="1600" b="1">
-                <a:solidFill>
-                  <a:srgbClr val="FFFFFF"/>
-                </a:solidFill>
-                <a:latin typeface="Cambria"/>
-              </a:rPr>
-              <a:t>2</a:t>
-            </a:r>
-          </a:p>
-        </p:txBody>
-      </p:sp>
-      <p:sp>
-        <p:nvSpPr>
-          <p:cNvPr id="8" name="TextBox 7"/>
-          <p:cNvSpPr txBox="1"/>
-          <p:nvPr/>
-        </p:nvSpPr>
-        <p:spPr>
-          <a:xfrm>
-            <a:off x="1600200" y="3182112"/>
-            <a:ext cx="9784080" cy="365760"/>
-          </a:xfrm>
-          <a:prstGeom prst="rect">
-            <a:avLst/>
-          </a:prstGeom>
-          <a:noFill/>
-        </p:spPr>
-        <p:txBody>
-          <a:bodyPr wrap="square" lIns="0" rIns="0" tIns="0" bIns="0" anchor="t">
-            <a:spAutoFit/>
-          </a:bodyPr>
-          <a:lstStyle/>
-          <a:p>
-            <a:pPr algn="l">
-              <a:lnSpc>
-                <a:spcPct val="125000"/>
-              </a:lnSpc>
-            </a:pPr>
-            <a:r>
-              <a:rPr sz="1600" b="1">
-                <a:solidFill>
-                  <a:srgbClr val="123A4D"/>
-                </a:solidFill>
-                <a:latin typeface="Cambria"/>
-              </a:rPr>
-              <a:t>Padronizar onde a variação é maior</a:t>
-            </a:r>
-          </a:p>
-        </p:txBody>
-      </p:sp>
-      <p:sp>
-        <p:nvSpPr>
-          <p:cNvPr id="9" name="TextBox 8"/>
-          <p:cNvSpPr txBox="1"/>
-          <p:nvPr/>
-        </p:nvSpPr>
-        <p:spPr>
-          <a:xfrm>
-            <a:off x="1600200" y="3621024"/>
-            <a:ext cx="9784080" cy="548640"/>
-          </a:xfrm>
-          <a:prstGeom prst="rect">
-            <a:avLst/>
-          </a:prstGeom>
-          <a:noFill/>
-        </p:spPr>
-        <p:txBody>
-          <a:bodyPr wrap="square" lIns="0" rIns="0" tIns="0" bIns="0" anchor="t">
-            <a:spAutoFit/>
-          </a:bodyPr>
-          <a:lstStyle/>
-          <a:p>
-            <a:pPr algn="l">
-              <a:lnSpc>
-                <a:spcPct val="130000"/>
-              </a:lnSpc>
-            </a:pPr>
-            <a:r>
-              <a:rPr sz="1250" b="0">
-                <a:solidFill>
-                  <a:srgbClr val="14181D"/>
-                </a:solidFill>
-                <a:latin typeface="Calibri"/>
-              </a:rPr>
-              <a:t>A faixa entre a visita mais rápida e a mais lenta é ampla demais para ser só porte de loja. Um padrão por canal reduz a cauda.</a:t>
-            </a:r>
-          </a:p>
-        </p:txBody>
-      </p:sp>
-      <p:sp>
-        <p:nvSpPr>
-          <p:cNvPr id="10" name="Oval 9"/>
-          <p:cNvSpPr/>
-          <p:nvPr/>
-        </p:nvSpPr>
-        <p:spPr>
-          <a:xfrm>
-            <a:off x="822960" y="4224528"/>
-            <a:ext cx="502920" cy="502920"/>
-          </a:xfrm>
-          <a:prstGeom prst="ellipse">
-            <a:avLst/>
-          </a:prstGeom>
-          <a:solidFill>
-            <a:srgbClr val="123A4D"/>
-          </a:solidFill>
-          <a:ln>
-            <a:noFill/>
-          </a:ln>
-          <a:effectLst/>
-        </p:spPr>
-        <p:style>
-          <a:lnRef idx="1">
-            <a:schemeClr val="accent1"/>
-          </a:lnRef>
-          <a:fillRef idx="3">
-            <a:schemeClr val="accent1"/>
-          </a:fillRef>
-          <a:effectRef idx="2">
-            <a:schemeClr val="accent1"/>
-          </a:effectRef>
-          <a:fontRef idx="minor">
-            <a:schemeClr val="lt1"/>
-          </a:fontRef>
-        </p:style>
-        <p:txBody>
-          <a:bodyPr rtlCol="0" anchor="ctr"/>
-          <a:lstStyle/>
-          <a:p>
-            <a:pPr algn="ctr"/>
-            <a:r>
-              <a:rPr sz="1600" b="1">
-                <a:solidFill>
-                  <a:srgbClr val="FFFFFF"/>
-                </a:solidFill>
-                <a:latin typeface="Cambria"/>
-              </a:rPr>
-              <a:t>3</a:t>
-            </a:r>
-          </a:p>
-        </p:txBody>
-      </p:sp>
-      <p:sp>
-        <p:nvSpPr>
-          <p:cNvPr id="11" name="TextBox 10"/>
-          <p:cNvSpPr txBox="1"/>
-          <p:nvPr/>
-        </p:nvSpPr>
-        <p:spPr>
-          <a:xfrm>
-            <a:off x="1600200" y="4242816"/>
-            <a:ext cx="9784080" cy="365760"/>
-          </a:xfrm>
-          <a:prstGeom prst="rect">
-            <a:avLst/>
-          </a:prstGeom>
-          <a:noFill/>
-        </p:spPr>
-        <p:txBody>
-          <a:bodyPr wrap="square" lIns="0" rIns="0" tIns="0" bIns="0" anchor="t">
-            <a:spAutoFit/>
-          </a:bodyPr>
-          <a:lstStyle/>
-          <a:p>
-            <a:pPr algn="l">
-              <a:lnSpc>
-                <a:spcPct val="125000"/>
-              </a:lnSpc>
-            </a:pPr>
-            <a:r>
-              <a:rPr sz="1600" b="1">
-                <a:solidFill>
-                  <a:srgbClr val="123A4D"/>
-                </a:solidFill>
-                <a:latin typeface="Cambria"/>
-              </a:rPr>
-              <a:t>Tratar DPP como operação própria</a:t>
-            </a:r>
-          </a:p>
-        </p:txBody>
-      </p:sp>
-      <p:sp>
-        <p:nvSpPr>
-          <p:cNvPr id="12" name="TextBox 11"/>
-          <p:cNvSpPr txBox="1"/>
-          <p:nvPr/>
-        </p:nvSpPr>
-        <p:spPr>
-          <a:xfrm>
-            <a:off x="1600200" y="4681728"/>
-            <a:ext cx="9784080" cy="548640"/>
-          </a:xfrm>
-          <a:prstGeom prst="rect">
-            <a:avLst/>
-          </a:prstGeom>
-          <a:noFill/>
-        </p:spPr>
-        <p:txBody>
-          <a:bodyPr wrap="square" lIns="0" rIns="0" tIns="0" bIns="0" anchor="t">
-            <a:spAutoFit/>
-          </a:bodyPr>
-          <a:lstStyle/>
-          <a:p>
-            <a:pPr algn="l">
-              <a:lnSpc>
-                <a:spcPct val="130000"/>
-              </a:lnSpc>
-            </a:pPr>
-            <a:r>
-              <a:rPr sz="1250" b="0">
-                <a:solidFill>
-                  <a:srgbClr val="14181D"/>
-                </a:solidFill>
-                <a:latin typeface="Calibri"/>
-              </a:rPr>
-              <a:t>Com 4 lojas por dia, o custo fixo de entrada pesa 4 vezes. Reduzir fricção de acesso vale mais nele do que em qualquer outro canal.</a:t>
-            </a:r>
-          </a:p>
-        </p:txBody>
-      </p:sp>
-      <p:sp>
-        <p:nvSpPr>
-          <p:cNvPr id="13" name="Oval 12"/>
-          <p:cNvSpPr/>
-          <p:nvPr/>
-        </p:nvSpPr>
-        <p:spPr>
-          <a:xfrm>
-            <a:off x="822960" y="5285232"/>
-            <a:ext cx="502920" cy="502920"/>
-          </a:xfrm>
-          <a:prstGeom prst="ellipse">
-            <a:avLst/>
-          </a:prstGeom>
-          <a:solidFill>
-            <a:srgbClr val="2F6B4F"/>
-          </a:solidFill>
-          <a:ln>
-            <a:noFill/>
-          </a:ln>
-          <a:effectLst/>
-        </p:spPr>
-        <p:style>
-          <a:lnRef idx="1">
-            <a:schemeClr val="accent1"/>
-          </a:lnRef>
-          <a:fillRef idx="3">
-            <a:schemeClr val="accent1"/>
-          </a:fillRef>
-          <a:effectRef idx="2">
-            <a:schemeClr val="accent1"/>
-          </a:effectRef>
-          <a:fontRef idx="minor">
-            <a:schemeClr val="lt1"/>
-          </a:fontRef>
-        </p:style>
-        <p:txBody>
-          <a:bodyPr rtlCol="0" anchor="ctr"/>
-          <a:lstStyle/>
-          <a:p>
-            <a:pPr algn="ctr"/>
-            <a:r>
-              <a:rPr sz="1600" b="1">
-                <a:solidFill>
-                  <a:srgbClr val="FFFFFF"/>
-                </a:solidFill>
-                <a:latin typeface="Cambria"/>
-              </a:rPr>
-              <a:t>4</a:t>
-            </a:r>
-          </a:p>
-        </p:txBody>
-      </p:sp>
-      <p:sp>
-        <p:nvSpPr>
-          <p:cNvPr id="14" name="TextBox 13"/>
-          <p:cNvSpPr txBox="1"/>
-          <p:nvPr/>
-        </p:nvSpPr>
-        <p:spPr>
-          <a:xfrm>
-            <a:off x="1600200" y="5303520"/>
-            <a:ext cx="9784080" cy="365760"/>
-          </a:xfrm>
-          <a:prstGeom prst="rect">
-            <a:avLst/>
-          </a:prstGeom>
-          <a:noFill/>
-        </p:spPr>
-        <p:txBody>
-          <a:bodyPr wrap="square" lIns="0" rIns="0" tIns="0" bIns="0" anchor="t">
-            <a:spAutoFit/>
-          </a:bodyPr>
-          <a:lstStyle/>
-          <a:p>
-            <a:pPr algn="l">
-              <a:lnSpc>
-                <a:spcPct val="125000"/>
-              </a:lnSpc>
-            </a:pPr>
-            <a:r>
-              <a:rPr sz="1600" b="1">
-                <a:solidFill>
-                  <a:srgbClr val="123A4D"/>
-                </a:solidFill>
-                <a:latin typeface="Cambria"/>
-              </a:rPr>
-              <a:t>Fechar a medição do deslocamento</a:t>
-            </a:r>
-          </a:p>
-        </p:txBody>
-      </p:sp>
-      <p:sp>
-        <p:nvSpPr>
-          <p:cNvPr id="15" name="TextBox 14"/>
-          <p:cNvSpPr txBox="1"/>
-          <p:nvPr/>
-        </p:nvSpPr>
-        <p:spPr>
-          <a:xfrm>
-            <a:off x="1600200" y="5742432"/>
-            <a:ext cx="9784080" cy="548640"/>
-          </a:xfrm>
-          <a:prstGeom prst="rect">
-            <a:avLst/>
-          </a:prstGeom>
-          <a:noFill/>
-        </p:spPr>
-        <p:txBody>
-          <a:bodyPr wrap="square" lIns="0" rIns="0" tIns="0" bIns="0" anchor="t">
-            <a:spAutoFit/>
-          </a:bodyPr>
-          <a:lstStyle/>
-          <a:p>
-            <a:pPr algn="l">
-              <a:lnSpc>
-                <a:spcPct val="130000"/>
-              </a:lnSpc>
-            </a:pPr>
-            <a:r>
-              <a:rPr sz="1250" b="0">
-                <a:solidFill>
-                  <a:srgbClr val="14181D"/>
-                </a:solidFill>
-                <a:latin typeface="Calibri"/>
-              </a:rPr>
-              <a:t>É o único bloco que falta para a jornada fechar de ponta a ponta. Manter a coleta até estabilizar a amostra.</a:t>
-            </a:r>
-          </a:p>
-        </p:txBody>
-      </p:sp>
-      <p:sp>
-        <p:nvSpPr>
-          <p:cNvPr id="16" name="TextBox 15"/>
-          <p:cNvSpPr txBox="1"/>
-          <p:nvPr/>
-        </p:nvSpPr>
-        <p:spPr>
-          <a:xfrm>
-            <a:off x="822960" y="6144768"/>
-            <a:ext cx="10607040" cy="274320"/>
-          </a:xfrm>
-          <a:prstGeom prst="rect">
-            <a:avLst/>
-          </a:prstGeom>
-          <a:noFill/>
-        </p:spPr>
-        <p:txBody>
-          <a:bodyPr wrap="square" lIns="0" rIns="0" tIns="0" bIns="0" anchor="t">
-            <a:spAutoFit/>
-          </a:bodyPr>
-          <a:lstStyle/>
-          <a:p>
-            <a:pPr algn="l">
-              <a:lnSpc>
-                <a:spcPct val="125000"/>
-              </a:lnSpc>
-            </a:pPr>
-            <a:r>
-              <a:rPr sz="900" b="0">
-                <a:solidFill>
-                  <a:srgbClr val="6D7887"/>
-                </a:solidFill>
-                <a:latin typeface="Calibri"/>
-              </a:rPr>
-              <a:t>As recomendações saem do que foi medido; o dimensionamento de ganho exige um piloto.</a:t>
-            </a:r>
-          </a:p>
-        </p:txBody>
-      </p:sp>
-    </p:spTree>
-  </p:cSld>
-  <p:clrMapOvr>
-    <a:masterClrMapping/>
-  </p:clrMapOvr>
-</p:sld>
-</file>
-
-<file path=ppt/slides/slide14.xml><?xml version="1.0" encoding="utf-8"?>
 <p:sld xmlns:a="http://schemas.openxmlformats.org/drawingml/2006/main" xmlns:p="http://schemas.openxmlformats.org/presentationml/2006/main" xmlns:r="http://schemas.openxmlformats.org/officeDocument/2006/relationships">
   <p:cSld>
     <p:bg>
@@ -7531,7 +6915,7 @@
                 </a:solidFill>
                 <a:latin typeface="Cambria"/>
               </a:rPr>
-              <a:t>A base continua viva</a:t>
+              <a:t>Do diagnóstico à ação</a:t>
             </a:r>
           </a:p>
         </p:txBody>
@@ -7545,7 +6929,7 @@
         <p:spPr>
           <a:xfrm>
             <a:off x="822960" y="3657600"/>
-            <a:ext cx="9601200" cy="1828800"/>
+            <a:ext cx="10058400" cy="1920240"/>
           </a:xfrm>
           <a:prstGeom prst="rect">
             <a:avLst/>
@@ -7570,7 +6954,7 @@
                 </a:solidFill>
                 <a:latin typeface="Calibri"/>
               </a:rPr>
-              <a:t>O aplicativo segue em campo e cada nova visita entra na mesma base. Os números deste deck</a:t>
+              <a:t>O tempo da operação está medido, movimento a movimento, canal a canal. O próximo passo é</a:t>
             </a:r>
           </a:p>
           <a:p>
@@ -7586,7 +6970,7 @@
                 </a:solidFill>
                 <a:latin typeface="Calibri"/>
               </a:rPr>
-              <a:t>saem direto dela: reprocessar a coleta atualiza o diagnóstico inteiro, sem retrabalho.</a:t>
+              <a:t>escolher onde atacar primeiro e testar em piloto controlado — o estudo dimensiona o</a:t>
             </a:r>
           </a:p>
           <a:p>
@@ -7602,6 +6986,22 @@
                 </a:solidFill>
                 <a:latin typeface="Calibri"/>
               </a:rPr>
+              <a:t>problema; o piloto dimensiona o ganho.</a:t>
+            </a:r>
+          </a:p>
+          <a:p>
+            <a:pPr algn="l">
+              <a:lnSpc>
+                <a:spcPct val="150000"/>
+              </a:lnSpc>
+            </a:pPr>
+            <a:r>
+              <a:rPr sz="1500" b="0">
+                <a:solidFill>
+                  <a:srgbClr val="CBE0E6"/>
+                </a:solidFill>
+                <a:latin typeface="Calibri"/>
+              </a:rPr>
               <a:t/>
             </a:r>
           </a:p>
@@ -7618,7 +7018,7 @@
                 </a:solidFill>
                 <a:latin typeface="Calibri"/>
               </a:rPr>
-              <a:t>A prioridade agora é fechar a medição do deslocamento entre lojas — o único bloco que</a:t>
+              <a:t>A medição continua rodando, então cada rodada de melhoria pode ser verificada com o</a:t>
             </a:r>
           </a:p>
           <a:p>
@@ -7634,7 +7034,7 @@
                 </a:solidFill>
                 <a:latin typeface="Calibri"/>
               </a:rPr>
-              <a:t>ainda falta para a jornada fechar de ponta a ponta.</a:t>
+              <a:t>mesmo instrumento que produziu este diagnóstico.</a:t>
             </a:r>
           </a:p>
         </p:txBody>
@@ -7673,7 +7073,7 @@
                 </a:solidFill>
                 <a:latin typeface="Calibri"/>
               </a:rPr>
-              <a:t>Estudo de Tempos e Movimentos  ·  11/08/2026 a 18/08/2026  ·  84 visitas</a:t>
+              <a:t>Estudo de Tempos e Movimentos  ·  11/08/2026 a 18/08/2026</a:t>
             </a:r>
           </a:p>
         </p:txBody>
@@ -7730,7 +7130,7 @@
                 </a:solidFill>
                 <a:latin typeface="Cambria"/>
               </a:rPr>
-              <a:t>O estudo em números</a:t>
+              <a:t>A jornada em números</a:t>
             </a:r>
           </a:p>
         </p:txBody>
@@ -7769,7 +7169,7 @@
                 </a:solidFill>
                 <a:latin typeface="Calibri"/>
               </a:rPr>
-              <a:t>Cobertura completa: todos os setores selecionados enviaram medições.</a:t>
+              <a:t>O retrato do tempo dentro da loja.</a:t>
             </a:r>
           </a:p>
         </p:txBody>
@@ -7854,7 +7254,7 @@
                 </a:solidFill>
                 <a:latin typeface="Cambria"/>
               </a:rPr>
-              <a:t>84</a:t>
+              <a:t>3h56</a:t>
             </a:r>
           </a:p>
         </p:txBody>
@@ -7893,7 +7293,7 @@
                 </a:solidFill>
                 <a:latin typeface="Calibri"/>
               </a:rPr>
-              <a:t>visitas medidas</a:t>
+              <a:t>tempo por loja</a:t>
             </a:r>
           </a:p>
         </p:txBody>
@@ -7932,7 +7332,7 @@
                 </a:solidFill>
                 <a:latin typeface="Cambria"/>
               </a:rPr>
-              <a:t>47</a:t>
+              <a:t>41%</a:t>
             </a:r>
           </a:p>
         </p:txBody>
@@ -7971,7 +7371,7 @@
                 </a:solidFill>
                 <a:latin typeface="Calibri"/>
               </a:rPr>
-              <a:t>promotores</a:t>
+              <a:t>agrega valor</a:t>
             </a:r>
           </a:p>
         </p:txBody>
@@ -8010,7 +7410,7 @@
                 </a:solidFill>
                 <a:latin typeface="Cambria"/>
               </a:rPr>
-              <a:t>48/48</a:t>
+              <a:t>1h57</a:t>
             </a:r>
           </a:p>
         </p:txBody>
@@ -8049,7 +7449,7 @@
                 </a:solidFill>
                 <a:latin typeface="Calibri"/>
               </a:rPr>
-              <a:t>setores cobertos</a:t>
+              <a:t>deslocamento e busca</a:t>
             </a:r>
           </a:p>
         </p:txBody>
@@ -8088,7 +7488,7 @@
                 </a:solidFill>
                 <a:latin typeface="Cambria"/>
               </a:rPr>
-              <a:t>8</a:t>
+              <a:t>61 min</a:t>
             </a:r>
           </a:p>
         </p:txBody>
@@ -8127,7 +7527,7 @@
                 </a:solidFill>
                 <a:latin typeface="Calibri"/>
               </a:rPr>
-              <a:t>canais</a:t>
+              <a:t>maior movimento</a:t>
             </a:r>
           </a:p>
         </p:txBody>
@@ -8166,7 +7566,7 @@
                 </a:solidFill>
                 <a:latin typeface="Cambria"/>
               </a:rPr>
-              <a:t>236 min</a:t>
+              <a:t>8</a:t>
             </a:r>
           </a:p>
         </p:txBody>
@@ -8205,7 +7605,7 @@
                 </a:solidFill>
                 <a:latin typeface="Calibri"/>
               </a:rPr>
-              <a:t>visita mediana</a:t>
+              <a:t>canais</a:t>
             </a:r>
           </a:p>
         </p:txBody>
@@ -8354,7 +7754,7 @@
                 </a:solidFill>
                 <a:latin typeface="Calibri"/>
               </a:rPr>
-              <a:t>Base: 84 visitas de 47 promotores, 11/08/2026 a 18/08/2026.</a:t>
+              <a:t>Tempo medido dentro da loja, em campo, na rotina real de trabalho.</a:t>
             </a:r>
           </a:p>
         </p:txBody>
@@ -9602,7 +9002,7 @@
                 </a:solidFill>
                 <a:latin typeface="Calibri"/>
               </a:rPr>
-              <a:t>Canais com menos de 8 visitas (CLUB, LASA, PERFUMARIA) ficam fora deste gráfico.</a:t>
+              <a:t>Execução = Ponto Natural, Ponto Extra e Check Out.</a:t>
             </a:r>
           </a:p>
         </p:txBody>
@@ -9755,7 +9155,7 @@
                 </a:solidFill>
                 <a:latin typeface="Calibri"/>
               </a:rPr>
-              <a:t>Ponto Natural é o maior bloco em todos os canais de amostra adequada.</a:t>
+              <a:t>Ponto Natural é o maior bloco em todos os canais.</a:t>
             </a:r>
           </a:p>
         </p:txBody>
@@ -10836,7 +10236,7 @@
                 </a:solidFill>
                 <a:latin typeface="Calibri"/>
               </a:rPr>
-              <a:t>Canais com amostra reduzida omitidos.</a:t>
+              <a:t>Tempo total dentro da loja, por visita.</a:t>
             </a:r>
           </a:p>
         </p:txBody>

--- a/analise/entregaveis/Tempos e Movimentos - Apresentacao.pptx
+++ b/analise/entregaveis/Tempos e Movimentos - Apresentacao.pptx
@@ -9251,7 +9251,7 @@
                 </a:solidFill>
                 <a:latin typeface="Calibri"/>
               </a:rPr>
-              <a:t>Os dez movimentos com maior peso, projetados em uma jornada de 8 horas.</a:t>
+              <a:t>Os dez de maior peso, projetados em uma jornada de 8 horas. Peso não é a mesma coisa que duração: nenhum movimento acontece em todas as lojas.</a:t>
             </a:r>
           </a:p>
         </p:txBody>
@@ -9265,8 +9265,8 @@
           <p:nvPr/>
         </p:nvGraphicFramePr>
         <p:xfrm>
-          <a:off x="822960" y="2057400"/>
-          <a:ext cx="10561320" cy="3657600"/>
+          <a:off x="822960" y="2148840"/>
+          <a:ext cx="10561320" cy="3200400"/>
         </p:xfrm>
         <a:graphic>
           <a:graphicData uri="http://schemas.openxmlformats.org/drawingml/2006/chart">
@@ -9282,8 +9282,8 @@
         </p:nvSpPr>
         <p:spPr>
           <a:xfrm>
-            <a:off x="822960" y="6144768"/>
-            <a:ext cx="10607040" cy="274320"/>
+            <a:off x="822960" y="5486400"/>
+            <a:ext cx="10561320" cy="548640"/>
           </a:xfrm>
           <a:prstGeom prst="rect">
             <a:avLst/>
@@ -9298,6 +9298,45 @@
           <a:p>
             <a:pPr algn="l">
               <a:lnSpc>
+                <a:spcPct val="135000"/>
+              </a:lnSpc>
+            </a:pPr>
+            <a:r>
+              <a:rPr sz="1300" b="0">
+                <a:solidFill>
+                  <a:srgbClr val="14181D"/>
+                </a:solidFill>
+                <a:latin typeface="Calibri"/>
+              </a:rPr>
+              <a:t>A leitura de loja é o exemplo: pesa 30 min na jornada, mas leva 53 min nas 63% das lojas em que é feita.</a:t>
+            </a:r>
+          </a:p>
+        </p:txBody>
+      </p:sp>
+      <p:sp>
+        <p:nvSpPr>
+          <p:cNvPr id="6" name="TextBox 5"/>
+          <p:cNvSpPr txBox="1"/>
+          <p:nvPr/>
+        </p:nvSpPr>
+        <p:spPr>
+          <a:xfrm>
+            <a:off x="822960" y="6144768"/>
+            <a:ext cx="10607040" cy="274320"/>
+          </a:xfrm>
+          <a:prstGeom prst="rect">
+            <a:avLst/>
+          </a:prstGeom>
+          <a:noFill/>
+        </p:spPr>
+        <p:txBody>
+          <a:bodyPr wrap="square" lIns="0" rIns="0" tIns="0" bIns="0" anchor="t">
+            <a:spAutoFit/>
+          </a:bodyPr>
+          <a:lstStyle/>
+          <a:p>
+            <a:pPr algn="l">
+              <a:lnSpc>
                 <a:spcPct val="125000"/>
               </a:lnSpc>
             </a:pPr>
@@ -9308,7 +9347,7 @@
                 </a:solidFill>
                 <a:latin typeface="Calibri"/>
               </a:rPr>
-              <a:t>Abastecimento e busca de itens no estoque somam 102 minutos da jornada.</a:t>
+              <a:t>Peso na jornada: o movimento diluído por todas as lojas, inclusive as em que ele não acontece.</a:t>
             </a:r>
           </a:p>
         </p:txBody>
